--- a/Above All.pptx
+++ b/Above All.pptx
@@ -257,7 +257,7 @@
           <a:p>
             <a:fld id="{E759A0DE-F190-5444-87AC-4719D5F20D15}" type="datetimeFigureOut">
               <a:rPr lang="en-US" smtClean="0"/>
-              <a:t>7/4/26</a:t>
+              <a:t>7/18/26</a:t>
             </a:fld>
             <a:endParaRPr lang="en-US"/>
           </a:p>
@@ -427,7 +427,7 @@
           <a:p>
             <a:fld id="{E759A0DE-F190-5444-87AC-4719D5F20D15}" type="datetimeFigureOut">
               <a:rPr lang="en-US" smtClean="0"/>
-              <a:t>7/4/26</a:t>
+              <a:t>7/18/26</a:t>
             </a:fld>
             <a:endParaRPr lang="en-US"/>
           </a:p>
@@ -607,7 +607,7 @@
           <a:p>
             <a:fld id="{E759A0DE-F190-5444-87AC-4719D5F20D15}" type="datetimeFigureOut">
               <a:rPr lang="en-US" smtClean="0"/>
-              <a:t>7/4/26</a:t>
+              <a:t>7/18/26</a:t>
             </a:fld>
             <a:endParaRPr lang="en-US"/>
           </a:p>
@@ -777,7 +777,7 @@
           <a:p>
             <a:fld id="{E759A0DE-F190-5444-87AC-4719D5F20D15}" type="datetimeFigureOut">
               <a:rPr lang="en-US" smtClean="0"/>
-              <a:t>7/4/26</a:t>
+              <a:t>7/18/26</a:t>
             </a:fld>
             <a:endParaRPr lang="en-US"/>
           </a:p>
@@ -1023,7 +1023,7 @@
           <a:p>
             <a:fld id="{E759A0DE-F190-5444-87AC-4719D5F20D15}" type="datetimeFigureOut">
               <a:rPr lang="en-US" smtClean="0"/>
-              <a:t>7/4/26</a:t>
+              <a:t>7/18/26</a:t>
             </a:fld>
             <a:endParaRPr lang="en-US"/>
           </a:p>
@@ -1255,7 +1255,7 @@
           <a:p>
             <a:fld id="{E759A0DE-F190-5444-87AC-4719D5F20D15}" type="datetimeFigureOut">
               <a:rPr lang="en-US" smtClean="0"/>
-              <a:t>7/4/26</a:t>
+              <a:t>7/18/26</a:t>
             </a:fld>
             <a:endParaRPr lang="en-US"/>
           </a:p>
@@ -1622,7 +1622,7 @@
           <a:p>
             <a:fld id="{E759A0DE-F190-5444-87AC-4719D5F20D15}" type="datetimeFigureOut">
               <a:rPr lang="en-US" smtClean="0"/>
-              <a:t>7/4/26</a:t>
+              <a:t>7/18/26</a:t>
             </a:fld>
             <a:endParaRPr lang="en-US"/>
           </a:p>
@@ -1740,7 +1740,7 @@
           <a:p>
             <a:fld id="{E759A0DE-F190-5444-87AC-4719D5F20D15}" type="datetimeFigureOut">
               <a:rPr lang="en-US" smtClean="0"/>
-              <a:t>7/4/26</a:t>
+              <a:t>7/18/26</a:t>
             </a:fld>
             <a:endParaRPr lang="en-US"/>
           </a:p>
@@ -1835,7 +1835,7 @@
           <a:p>
             <a:fld id="{E759A0DE-F190-5444-87AC-4719D5F20D15}" type="datetimeFigureOut">
               <a:rPr lang="en-US" smtClean="0"/>
-              <a:t>7/4/26</a:t>
+              <a:t>7/18/26</a:t>
             </a:fld>
             <a:endParaRPr lang="en-US"/>
           </a:p>
@@ -2112,7 +2112,7 @@
           <a:p>
             <a:fld id="{E759A0DE-F190-5444-87AC-4719D5F20D15}" type="datetimeFigureOut">
               <a:rPr lang="en-US" smtClean="0"/>
-              <a:t>7/4/26</a:t>
+              <a:t>7/18/26</a:t>
             </a:fld>
             <a:endParaRPr lang="en-US"/>
           </a:p>
@@ -2369,7 +2369,7 @@
           <a:p>
             <a:fld id="{E759A0DE-F190-5444-87AC-4719D5F20D15}" type="datetimeFigureOut">
               <a:rPr lang="en-US" smtClean="0"/>
-              <a:t>7/4/26</a:t>
+              <a:t>7/18/26</a:t>
             </a:fld>
             <a:endParaRPr lang="en-US"/>
           </a:p>
@@ -2582,7 +2582,7 @@
           <a:p>
             <a:fld id="{E759A0DE-F190-5444-87AC-4719D5F20D15}" type="datetimeFigureOut">
               <a:rPr lang="en-US" smtClean="0"/>
-              <a:t>7/4/26</a:t>
+              <a:t>7/18/26</a:t>
             </a:fld>
             <a:endParaRPr lang="en-US"/>
           </a:p>
@@ -3043,6 +3043,103 @@
           </a:p>
         </p:txBody>
       </p:sp>
+      <p:sp>
+        <p:nvSpPr>
+          <p:cNvPr id="2" name="TextBox 1">
+            <a:extLst>
+              <a:ext uri="{FF2B5EF4-FFF2-40B4-BE49-F238E27FC236}">
+                <a16:creationId xmlns:a16="http://schemas.microsoft.com/office/drawing/2014/main" id="{8846CEB0-F801-400C-A01E-A09C087CE579}"/>
+              </a:ext>
+            </a:extLst>
+          </p:cNvPr>
+          <p:cNvSpPr txBox="1"/>
+          <p:nvPr/>
+        </p:nvSpPr>
+        <p:spPr>
+          <a:xfrm>
+            <a:off x="168442" y="5444311"/>
+            <a:ext cx="8807115" cy="1200329"/>
+          </a:xfrm>
+          <a:prstGeom prst="rect">
+            <a:avLst/>
+          </a:prstGeom>
+          <a:noFill/>
+        </p:spPr>
+        <p:txBody>
+          <a:bodyPr wrap="square" rtlCol="0">
+            <a:spAutoFit/>
+          </a:bodyPr>
+          <a:lstStyle/>
+          <a:p>
+            <a:pPr algn="ctr"/>
+            <a:r>
+              <a:rPr lang="en-US" dirty="0">
+                <a:solidFill>
+                  <a:schemeClr val="bg1"/>
+                </a:solidFill>
+              </a:rPr>
+              <a:t>Words &amp; Musci by Lenny LeBlanc &amp; Paul Baloche (1999)</a:t>
+            </a:r>
+          </a:p>
+          <a:p>
+            <a:pPr algn="ctr"/>
+            <a:r>
+              <a:rPr lang="en-US" dirty="0">
+                <a:solidFill>
+                  <a:schemeClr val="bg1"/>
+                </a:solidFill>
+              </a:rPr>
+              <a:t>© 1999 Integrity's Hosanna! Music; </a:t>
+            </a:r>
+            <a:r>
+              <a:rPr lang="en-US" dirty="0" err="1">
+                <a:solidFill>
+                  <a:schemeClr val="bg1"/>
+                </a:solidFill>
+              </a:rPr>
+              <a:t>Leadworship</a:t>
+            </a:r>
+            <a:r>
+              <a:rPr lang="en-US" dirty="0">
+                <a:solidFill>
+                  <a:schemeClr val="bg1"/>
+                </a:solidFill>
+              </a:rPr>
+              <a:t> Songs; </a:t>
+            </a:r>
+          </a:p>
+          <a:p>
+            <a:pPr algn="ctr"/>
+            <a:r>
+              <a:rPr lang="en-US" dirty="0" err="1">
+                <a:solidFill>
+                  <a:schemeClr val="bg1"/>
+                </a:solidFill>
+              </a:rPr>
+              <a:t>LenSongs</a:t>
+            </a:r>
+            <a:r>
+              <a:rPr lang="en-US" dirty="0">
+                <a:solidFill>
+                  <a:schemeClr val="bg1"/>
+                </a:solidFill>
+              </a:rPr>
+              <a:t> Publishing</a:t>
+            </a:r>
+          </a:p>
+          <a:p>
+            <a:pPr algn="ctr"/>
+            <a:r>
+              <a:rPr lang="en-US" dirty="0">
+                <a:solidFill>
+                  <a:schemeClr val="bg1"/>
+                </a:solidFill>
+              </a:rPr>
+              <a:t>CCLI License #137776</a:t>
+            </a:r>
+          </a:p>
+        </p:txBody>
+      </p:sp>
     </p:spTree>
     <p:extLst>
       <p:ext uri="{BB962C8B-B14F-4D97-AF65-F5344CB8AC3E}">
@@ -3115,7 +3212,7 @@
           </a:bodyPr>
           <a:lstStyle/>
           <a:p>
-            <a:endParaRPr lang="en-US" sz="4400" dirty="0">
+            <a:endParaRPr lang="en-US" sz="5400" dirty="0">
               <a:solidFill>
                 <a:schemeClr val="bg1"/>
               </a:solidFill>
@@ -3125,7 +3222,7 @@
           </a:p>
           <a:p>
             <a:r>
-              <a:rPr lang="en-US" sz="4400" dirty="0">
+              <a:rPr lang="en-US" sz="5400" dirty="0">
                 <a:solidFill>
                   <a:schemeClr val="bg1"/>
                 </a:solidFill>
@@ -3137,7 +3234,7 @@
           </a:p>
           <a:p>
             <a:r>
-              <a:rPr lang="en-US" sz="4400" dirty="0">
+              <a:rPr lang="en-US" sz="5400" dirty="0">
                 <a:solidFill>
                   <a:schemeClr val="bg1"/>
                 </a:solidFill>
@@ -3148,7 +3245,7 @@
             </a:r>
           </a:p>
           <a:p>
-            <a:endParaRPr lang="en-US" sz="4400" dirty="0">
+            <a:endParaRPr lang="en-US" sz="5400" dirty="0">
               <a:solidFill>
                 <a:schemeClr val="bg1"/>
               </a:solidFill>
@@ -3158,7 +3255,7 @@
           </a:p>
           <a:p>
             <a:r>
-              <a:rPr lang="en-US" sz="4400" dirty="0">
+              <a:rPr lang="en-US" sz="5400" dirty="0">
                 <a:solidFill>
                   <a:schemeClr val="bg1"/>
                 </a:solidFill>
@@ -3170,7 +3267,7 @@
           </a:p>
           <a:p>
             <a:r>
-              <a:rPr lang="en-US" sz="4400" dirty="0">
+              <a:rPr lang="en-US" sz="5400" dirty="0">
                 <a:solidFill>
                   <a:schemeClr val="bg1"/>
                 </a:solidFill>
@@ -3181,7 +3278,7 @@
             </a:r>
           </a:p>
           <a:p>
-            <a:endParaRPr lang="en-US" sz="4400" dirty="0">
+            <a:endParaRPr lang="en-US" sz="5400" dirty="0">
               <a:solidFill>
                 <a:schemeClr val="bg1"/>
               </a:solidFill>
@@ -3263,7 +3360,7 @@
           </a:bodyPr>
           <a:lstStyle/>
           <a:p>
-            <a:endParaRPr lang="en-US" sz="4400" dirty="0">
+            <a:endParaRPr lang="en-US" sz="5400" dirty="0">
               <a:solidFill>
                 <a:schemeClr val="bg1"/>
               </a:solidFill>
@@ -3273,7 +3370,7 @@
           </a:p>
           <a:p>
             <a:r>
-              <a:rPr lang="en-US" sz="4400" dirty="0">
+              <a:rPr lang="en-US" sz="5400" dirty="0">
                 <a:solidFill>
                   <a:schemeClr val="bg1"/>
                 </a:solidFill>
@@ -3285,7 +3382,7 @@
           </a:p>
           <a:p>
             <a:r>
-              <a:rPr lang="en-US" sz="4400" dirty="0">
+              <a:rPr lang="en-US" sz="5400" dirty="0">
                 <a:solidFill>
                   <a:schemeClr val="bg1"/>
                 </a:solidFill>
@@ -3296,7 +3393,7 @@
             </a:r>
           </a:p>
           <a:p>
-            <a:endParaRPr lang="en-US" sz="4400" dirty="0">
+            <a:endParaRPr lang="en-US" sz="5400" dirty="0">
               <a:solidFill>
                 <a:schemeClr val="bg1"/>
               </a:solidFill>
@@ -3306,7 +3403,7 @@
           </a:p>
           <a:p>
             <a:r>
-              <a:rPr lang="en-US" sz="4400" dirty="0">
+              <a:rPr lang="en-US" sz="5400" dirty="0">
                 <a:solidFill>
                   <a:schemeClr val="bg1"/>
                 </a:solidFill>
@@ -3318,7 +3415,7 @@
           </a:p>
           <a:p>
             <a:r>
-              <a:rPr lang="en-US" sz="4400" dirty="0">
+              <a:rPr lang="en-US" sz="5400" dirty="0">
                 <a:solidFill>
                   <a:schemeClr val="bg1"/>
                 </a:solidFill>
@@ -3329,7 +3426,7 @@
             </a:r>
           </a:p>
           <a:p>
-            <a:endParaRPr lang="en-US" sz="4400" dirty="0">
+            <a:endParaRPr lang="en-US" sz="5400" dirty="0">
               <a:solidFill>
                 <a:schemeClr val="bg1"/>
               </a:solidFill>
@@ -3411,7 +3508,7 @@
           </a:bodyPr>
           <a:lstStyle/>
           <a:p>
-            <a:endParaRPr lang="en-US" sz="4400" dirty="0">
+            <a:endParaRPr lang="en-US" sz="5400" dirty="0">
               <a:solidFill>
                 <a:schemeClr val="bg1"/>
               </a:solidFill>
@@ -3421,7 +3518,7 @@
           </a:p>
           <a:p>
             <a:r>
-              <a:rPr lang="en-US" sz="4400" dirty="0">
+              <a:rPr lang="en-US" sz="5400" dirty="0">
                 <a:solidFill>
                   <a:schemeClr val="bg1"/>
                 </a:solidFill>
@@ -3433,7 +3530,7 @@
           </a:p>
           <a:p>
             <a:r>
-              <a:rPr lang="en-US" sz="4400" dirty="0">
+              <a:rPr lang="en-US" sz="5400" dirty="0">
                 <a:solidFill>
                   <a:schemeClr val="bg1"/>
                 </a:solidFill>
@@ -3445,7 +3542,7 @@
           </a:p>
           <a:p>
             <a:r>
-              <a:rPr lang="en-US" sz="4400" dirty="0">
+              <a:rPr lang="en-US" sz="5400" dirty="0">
                 <a:solidFill>
                   <a:schemeClr val="bg1"/>
                 </a:solidFill>
@@ -3456,7 +3553,7 @@
             </a:r>
           </a:p>
           <a:p>
-            <a:endParaRPr lang="en-US" sz="4400" dirty="0">
+            <a:endParaRPr lang="en-US" sz="5400" dirty="0">
               <a:solidFill>
                 <a:schemeClr val="bg1"/>
               </a:solidFill>
@@ -3538,7 +3635,7 @@
           </a:bodyPr>
           <a:lstStyle/>
           <a:p>
-            <a:endParaRPr lang="en-US" sz="4400" dirty="0">
+            <a:endParaRPr lang="en-US" sz="5400" dirty="0">
               <a:solidFill>
                 <a:schemeClr val="bg1"/>
               </a:solidFill>
@@ -3548,7 +3645,7 @@
           </a:p>
           <a:p>
             <a:r>
-              <a:rPr lang="en-US" sz="4400" dirty="0">
+              <a:rPr lang="en-US" sz="5400" dirty="0">
                 <a:solidFill>
                   <a:schemeClr val="bg1"/>
                 </a:solidFill>
@@ -3560,7 +3657,7 @@
           </a:p>
           <a:p>
             <a:r>
-              <a:rPr lang="en-US" sz="4400" dirty="0">
+              <a:rPr lang="en-US" sz="5400" dirty="0">
                 <a:solidFill>
                   <a:schemeClr val="bg1"/>
                 </a:solidFill>
@@ -3571,7 +3668,31 @@
             </a:r>
           </a:p>
           <a:p>
-            <a:endParaRPr lang="en-US" sz="4400" dirty="0">
+            <a:r>
+              <a:rPr lang="en-US" sz="5400" dirty="0">
+                <a:solidFill>
+                  <a:schemeClr val="bg1"/>
+                </a:solidFill>
+                <a:latin typeface="Avenir Medium" panose="02000503020000020003" pitchFamily="2" charset="0"/>
+                <a:ea typeface="Bodoni Ornaments" pitchFamily="2" charset="0"/>
+              </a:rPr>
+              <a:t>You took the fall, </a:t>
+            </a:r>
+          </a:p>
+          <a:p>
+            <a:r>
+              <a:rPr lang="en-US" sz="5400" dirty="0">
+                <a:solidFill>
+                  <a:schemeClr val="bg1"/>
+                </a:solidFill>
+                <a:latin typeface="Avenir Medium" panose="02000503020000020003" pitchFamily="2" charset="0"/>
+                <a:ea typeface="Bodoni Ornaments" pitchFamily="2" charset="0"/>
+              </a:rPr>
+              <a:t>and thought of me </a:t>
+            </a:r>
+          </a:p>
+          <a:p>
+            <a:endParaRPr lang="en-US" sz="5400" dirty="0">
               <a:solidFill>
                 <a:schemeClr val="bg1"/>
               </a:solidFill>
@@ -3581,40 +3702,7 @@
           </a:p>
           <a:p>
             <a:r>
-              <a:rPr lang="en-US" sz="4400" dirty="0">
-                <a:solidFill>
-                  <a:schemeClr val="bg1"/>
-                </a:solidFill>
-                <a:latin typeface="Avenir Medium" panose="02000503020000020003" pitchFamily="2" charset="0"/>
-                <a:ea typeface="Bodoni Ornaments" pitchFamily="2" charset="0"/>
-              </a:rPr>
-              <a:t>You took the fall, </a:t>
-            </a:r>
-          </a:p>
-          <a:p>
-            <a:r>
-              <a:rPr lang="en-US" sz="4400" dirty="0">
-                <a:solidFill>
-                  <a:schemeClr val="bg1"/>
-                </a:solidFill>
-                <a:latin typeface="Avenir Medium" panose="02000503020000020003" pitchFamily="2" charset="0"/>
-                <a:ea typeface="Bodoni Ornaments" pitchFamily="2" charset="0"/>
-              </a:rPr>
-              <a:t>and thought of me </a:t>
-            </a:r>
-          </a:p>
-          <a:p>
-            <a:endParaRPr lang="en-US" sz="4400" dirty="0">
-              <a:solidFill>
-                <a:schemeClr val="bg1"/>
-              </a:solidFill>
-              <a:latin typeface="Avenir Medium" panose="02000503020000020003" pitchFamily="2" charset="0"/>
-              <a:ea typeface="Bodoni Ornaments" pitchFamily="2" charset="0"/>
-            </a:endParaRPr>
-          </a:p>
-          <a:p>
-            <a:r>
-              <a:rPr lang="en-US" sz="4400" dirty="0">
+              <a:rPr lang="en-US" sz="5400" dirty="0">
                 <a:solidFill>
                   <a:schemeClr val="bg1"/>
                 </a:solidFill>
@@ -3625,7 +3713,7 @@
             </a:r>
           </a:p>
           <a:p>
-            <a:endParaRPr lang="en-US" sz="4400" dirty="0">
+            <a:endParaRPr lang="en-US" sz="5400" dirty="0">
               <a:solidFill>
                 <a:schemeClr val="bg1"/>
               </a:solidFill>
@@ -3707,7 +3795,7 @@
           </a:bodyPr>
           <a:lstStyle/>
           <a:p>
-            <a:endParaRPr lang="en-US" sz="4400" dirty="0">
+            <a:endParaRPr lang="en-US" sz="5400" dirty="0">
               <a:solidFill>
                 <a:schemeClr val="bg1"/>
               </a:solidFill>
@@ -3717,7 +3805,7 @@
           </a:p>
           <a:p>
             <a:r>
-              <a:rPr lang="en-US" sz="4400" dirty="0">
+              <a:rPr lang="en-US" sz="5400" dirty="0">
                 <a:solidFill>
                   <a:schemeClr val="bg1"/>
                 </a:solidFill>
@@ -3729,7 +3817,7 @@
           </a:p>
           <a:p>
             <a:r>
-              <a:rPr lang="en-US" sz="4400" dirty="0">
+              <a:rPr lang="en-US" sz="5400" dirty="0">
                 <a:solidFill>
                   <a:schemeClr val="bg1"/>
                 </a:solidFill>
@@ -3741,7 +3829,7 @@
           </a:p>
           <a:p>
             <a:r>
-              <a:rPr lang="en-US" sz="4400" dirty="0">
+              <a:rPr lang="en-US" sz="5400" dirty="0">
                 <a:solidFill>
                   <a:schemeClr val="bg1"/>
                 </a:solidFill>
@@ -3752,7 +3840,7 @@
             </a:r>
           </a:p>
           <a:p>
-            <a:endParaRPr lang="en-US" sz="4400" dirty="0">
+            <a:endParaRPr lang="en-US" sz="5400" dirty="0">
               <a:solidFill>
                 <a:schemeClr val="bg1"/>
               </a:solidFill>
@@ -3834,7 +3922,7 @@
           </a:bodyPr>
           <a:lstStyle/>
           <a:p>
-            <a:endParaRPr lang="en-US" sz="4400" dirty="0">
+            <a:endParaRPr lang="en-US" sz="5400" dirty="0">
               <a:solidFill>
                 <a:schemeClr val="bg1"/>
               </a:solidFill>
@@ -3844,7 +3932,7 @@
           </a:p>
           <a:p>
             <a:r>
-              <a:rPr lang="en-US" sz="4400" dirty="0">
+              <a:rPr lang="en-US" sz="5400" dirty="0">
                 <a:solidFill>
                   <a:schemeClr val="bg1"/>
                 </a:solidFill>
@@ -3856,7 +3944,7 @@
           </a:p>
           <a:p>
             <a:r>
-              <a:rPr lang="en-US" sz="4400" dirty="0">
+              <a:rPr lang="en-US" sz="5400" dirty="0">
                 <a:solidFill>
                   <a:schemeClr val="bg1"/>
                 </a:solidFill>
@@ -3867,7 +3955,31 @@
             </a:r>
           </a:p>
           <a:p>
-            <a:endParaRPr lang="en-US" sz="4400" dirty="0">
+            <a:r>
+              <a:rPr lang="en-US" sz="5400" dirty="0">
+                <a:solidFill>
+                  <a:schemeClr val="bg1"/>
+                </a:solidFill>
+                <a:latin typeface="Avenir Medium" panose="02000503020000020003" pitchFamily="2" charset="0"/>
+                <a:ea typeface="Bodoni Ornaments" pitchFamily="2" charset="0"/>
+              </a:rPr>
+              <a:t>You took the fall, </a:t>
+            </a:r>
+          </a:p>
+          <a:p>
+            <a:r>
+              <a:rPr lang="en-US" sz="5400" dirty="0">
+                <a:solidFill>
+                  <a:schemeClr val="bg1"/>
+                </a:solidFill>
+                <a:latin typeface="Avenir Medium" panose="02000503020000020003" pitchFamily="2" charset="0"/>
+                <a:ea typeface="Bodoni Ornaments" pitchFamily="2" charset="0"/>
+              </a:rPr>
+              <a:t>and thought of me </a:t>
+            </a:r>
+          </a:p>
+          <a:p>
+            <a:endParaRPr lang="en-US" sz="5400" dirty="0">
               <a:solidFill>
                 <a:schemeClr val="bg1"/>
               </a:solidFill>
@@ -3877,40 +3989,7 @@
           </a:p>
           <a:p>
             <a:r>
-              <a:rPr lang="en-US" sz="4400" dirty="0">
-                <a:solidFill>
-                  <a:schemeClr val="bg1"/>
-                </a:solidFill>
-                <a:latin typeface="Avenir Medium" panose="02000503020000020003" pitchFamily="2" charset="0"/>
-                <a:ea typeface="Bodoni Ornaments" pitchFamily="2" charset="0"/>
-              </a:rPr>
-              <a:t>You took the fall, </a:t>
-            </a:r>
-          </a:p>
-          <a:p>
-            <a:r>
-              <a:rPr lang="en-US" sz="4400" dirty="0">
-                <a:solidFill>
-                  <a:schemeClr val="bg1"/>
-                </a:solidFill>
-                <a:latin typeface="Avenir Medium" panose="02000503020000020003" pitchFamily="2" charset="0"/>
-                <a:ea typeface="Bodoni Ornaments" pitchFamily="2" charset="0"/>
-              </a:rPr>
-              <a:t>and thought of me </a:t>
-            </a:r>
-          </a:p>
-          <a:p>
-            <a:endParaRPr lang="en-US" sz="4400" dirty="0">
-              <a:solidFill>
-                <a:schemeClr val="bg1"/>
-              </a:solidFill>
-              <a:latin typeface="Avenir Medium" panose="02000503020000020003" pitchFamily="2" charset="0"/>
-              <a:ea typeface="Bodoni Ornaments" pitchFamily="2" charset="0"/>
-            </a:endParaRPr>
-          </a:p>
-          <a:p>
-            <a:r>
-              <a:rPr lang="en-US" sz="4400" dirty="0">
+              <a:rPr lang="en-US" sz="5400" dirty="0">
                 <a:solidFill>
                   <a:schemeClr val="bg1"/>
                 </a:solidFill>
@@ -3921,7 +4000,7 @@
             </a:r>
           </a:p>
           <a:p>
-            <a:endParaRPr lang="en-US" sz="4400" dirty="0">
+            <a:endParaRPr lang="en-US" sz="5400" dirty="0">
               <a:solidFill>
                 <a:schemeClr val="bg1"/>
               </a:solidFill>
@@ -4003,7 +4082,7 @@
           </a:bodyPr>
           <a:lstStyle/>
           <a:p>
-            <a:endParaRPr lang="en-US" sz="4400" dirty="0">
+            <a:endParaRPr lang="en-US" sz="5400" dirty="0">
               <a:solidFill>
                 <a:schemeClr val="bg1"/>
               </a:solidFill>
@@ -4012,7 +4091,7 @@
             </a:endParaRPr>
           </a:p>
           <a:p>
-            <a:endParaRPr lang="en-US" sz="4400" dirty="0">
+            <a:endParaRPr lang="en-US" sz="5400" dirty="0">
               <a:solidFill>
                 <a:schemeClr val="bg1"/>
               </a:solidFill>
@@ -4022,30 +4101,54 @@
           </a:p>
           <a:p>
             <a:r>
-              <a:rPr lang="en-US" sz="4400" dirty="0">
-                <a:solidFill>
-                  <a:schemeClr val="bg1"/>
-                </a:solidFill>
-                <a:latin typeface="Avenir Medium" panose="02000503020000020003" pitchFamily="2" charset="0"/>
-                <a:ea typeface="Bodoni Ornaments" pitchFamily="2" charset="0"/>
-              </a:rPr>
-              <a:t>Above all powers, above all Kings</a:t>
-            </a:r>
-          </a:p>
-          <a:p>
-            <a:r>
-              <a:rPr lang="en-US" sz="4400" dirty="0">
-                <a:solidFill>
-                  <a:schemeClr val="bg1"/>
-                </a:solidFill>
-                <a:latin typeface="Avenir Medium" panose="02000503020000020003" pitchFamily="2" charset="0"/>
-                <a:ea typeface="Bodoni Ornaments" pitchFamily="2" charset="0"/>
-              </a:rPr>
-              <a:t>Above all nature, and all created things</a:t>
-            </a:r>
-          </a:p>
-          <a:p>
-            <a:endParaRPr lang="en-US" sz="4400" dirty="0">
+              <a:rPr lang="en-US" sz="5400" dirty="0">
+                <a:solidFill>
+                  <a:schemeClr val="bg1"/>
+                </a:solidFill>
+                <a:latin typeface="Avenir Medium" panose="02000503020000020003" pitchFamily="2" charset="0"/>
+                <a:ea typeface="Bodoni Ornaments" pitchFamily="2" charset="0"/>
+              </a:rPr>
+              <a:t>Above all powers, </a:t>
+            </a:r>
+          </a:p>
+          <a:p>
+            <a:r>
+              <a:rPr lang="en-US" sz="5400" dirty="0">
+                <a:solidFill>
+                  <a:schemeClr val="bg1"/>
+                </a:solidFill>
+                <a:latin typeface="Avenir Medium" panose="02000503020000020003" pitchFamily="2" charset="0"/>
+                <a:ea typeface="Bodoni Ornaments" pitchFamily="2" charset="0"/>
+              </a:rPr>
+              <a:t>above all Kings</a:t>
+            </a:r>
+          </a:p>
+          <a:p>
+            <a:r>
+              <a:rPr lang="en-US" sz="5400" dirty="0">
+                <a:solidFill>
+                  <a:schemeClr val="bg1"/>
+                </a:solidFill>
+                <a:latin typeface="Avenir Medium" panose="02000503020000020003" pitchFamily="2" charset="0"/>
+                <a:ea typeface="Bodoni Ornaments" pitchFamily="2" charset="0"/>
+              </a:rPr>
+              <a:t>Above all nature, </a:t>
+            </a:r>
+          </a:p>
+          <a:p>
+            <a:r>
+              <a:rPr lang="en-US" sz="5400" dirty="0">
+                <a:solidFill>
+                  <a:schemeClr val="bg1"/>
+                </a:solidFill>
+                <a:latin typeface="Avenir Medium" panose="02000503020000020003" pitchFamily="2" charset="0"/>
+                <a:ea typeface="Bodoni Ornaments" pitchFamily="2" charset="0"/>
+              </a:rPr>
+              <a:t>and all created things</a:t>
+            </a:r>
+          </a:p>
+          <a:p>
+            <a:endParaRPr lang="en-US" sz="5400" dirty="0">
               <a:solidFill>
                 <a:schemeClr val="bg1"/>
               </a:solidFill>
@@ -4127,7 +4230,7 @@
           </a:bodyPr>
           <a:lstStyle/>
           <a:p>
-            <a:endParaRPr lang="en-US" sz="4400" dirty="0">
+            <a:endParaRPr lang="en-US" sz="5400" dirty="0">
               <a:solidFill>
                 <a:schemeClr val="bg1"/>
               </a:solidFill>
@@ -4136,7 +4239,31 @@
             </a:endParaRPr>
           </a:p>
           <a:p>
-            <a:endParaRPr lang="en-US" sz="4400" dirty="0">
+            <a:r>
+              <a:rPr lang="en-US" sz="5400" dirty="0">
+                <a:solidFill>
+                  <a:schemeClr val="bg1"/>
+                </a:solidFill>
+                <a:latin typeface="Avenir Medium" panose="02000503020000020003" pitchFamily="2" charset="0"/>
+                <a:ea typeface="Bodoni Ornaments" pitchFamily="2" charset="0"/>
+              </a:rPr>
+              <a:t>Above all wisdom, </a:t>
+            </a:r>
+          </a:p>
+          <a:p>
+            <a:r>
+              <a:rPr lang="en-US" sz="5400" dirty="0">
+                <a:solidFill>
+                  <a:schemeClr val="bg1"/>
+                </a:solidFill>
+                <a:latin typeface="Avenir Medium" panose="02000503020000020003" pitchFamily="2" charset="0"/>
+                <a:ea typeface="Bodoni Ornaments" pitchFamily="2" charset="0"/>
+              </a:rPr>
+              <a:t>and all the ways of man </a:t>
+            </a:r>
+          </a:p>
+          <a:p>
+            <a:endParaRPr lang="en-US" sz="5400" dirty="0">
               <a:solidFill>
                 <a:schemeClr val="bg1"/>
               </a:solidFill>
@@ -4146,40 +4273,7 @@
           </a:p>
           <a:p>
             <a:r>
-              <a:rPr lang="en-US" sz="4400" dirty="0">
-                <a:solidFill>
-                  <a:schemeClr val="bg1"/>
-                </a:solidFill>
-                <a:latin typeface="Avenir Medium" panose="02000503020000020003" pitchFamily="2" charset="0"/>
-                <a:ea typeface="Bodoni Ornaments" pitchFamily="2" charset="0"/>
-              </a:rPr>
-              <a:t>Above all wisdom, </a:t>
-            </a:r>
-          </a:p>
-          <a:p>
-            <a:r>
-              <a:rPr lang="en-US" sz="4400" dirty="0">
-                <a:solidFill>
-                  <a:schemeClr val="bg1"/>
-                </a:solidFill>
-                <a:latin typeface="Avenir Medium" panose="02000503020000020003" pitchFamily="2" charset="0"/>
-                <a:ea typeface="Bodoni Ornaments" pitchFamily="2" charset="0"/>
-              </a:rPr>
-              <a:t>and all the ways of man </a:t>
-            </a:r>
-          </a:p>
-          <a:p>
-            <a:endParaRPr lang="en-US" sz="4400" dirty="0">
-              <a:solidFill>
-                <a:schemeClr val="bg1"/>
-              </a:solidFill>
-              <a:latin typeface="Avenir Medium" panose="02000503020000020003" pitchFamily="2" charset="0"/>
-              <a:ea typeface="Bodoni Ornaments" pitchFamily="2" charset="0"/>
-            </a:endParaRPr>
-          </a:p>
-          <a:p>
-            <a:r>
-              <a:rPr lang="en-US" sz="4400" dirty="0">
+              <a:rPr lang="en-US" sz="5400" dirty="0">
                 <a:solidFill>
                   <a:schemeClr val="bg1"/>
                 </a:solidFill>
@@ -4191,7 +4285,7 @@
           </a:p>
           <a:p>
             <a:r>
-              <a:rPr lang="en-US" sz="4400" dirty="0">
+              <a:rPr lang="en-US" sz="5400" dirty="0">
                 <a:solidFill>
                   <a:schemeClr val="bg1"/>
                 </a:solidFill>
@@ -4202,7 +4296,7 @@
             </a:r>
           </a:p>
           <a:p>
-            <a:endParaRPr lang="en-US" sz="4400" dirty="0">
+            <a:endParaRPr lang="en-US" sz="5400" dirty="0">
               <a:solidFill>
                 <a:schemeClr val="bg1"/>
               </a:solidFill>
@@ -4284,7 +4378,7 @@
           </a:bodyPr>
           <a:lstStyle/>
           <a:p>
-            <a:endParaRPr lang="en-US" sz="4400" dirty="0">
+            <a:endParaRPr lang="en-US" sz="5400" dirty="0">
               <a:solidFill>
                 <a:schemeClr val="bg1"/>
               </a:solidFill>
@@ -4294,7 +4388,7 @@
           </a:p>
           <a:p>
             <a:r>
-              <a:rPr lang="en-US" sz="4400" dirty="0">
+              <a:rPr lang="en-US" sz="5400" dirty="0">
                 <a:solidFill>
                   <a:schemeClr val="bg1"/>
                 </a:solidFill>
@@ -4306,7 +4400,7 @@
           </a:p>
           <a:p>
             <a:r>
-              <a:rPr lang="en-US" sz="4400" dirty="0">
+              <a:rPr lang="en-US" sz="5400" dirty="0">
                 <a:solidFill>
                   <a:schemeClr val="bg1"/>
                 </a:solidFill>
@@ -4317,7 +4411,7 @@
             </a:r>
           </a:p>
           <a:p>
-            <a:endParaRPr lang="en-US" sz="4400" dirty="0">
+            <a:endParaRPr lang="en-US" sz="5400" dirty="0">
               <a:solidFill>
                 <a:schemeClr val="bg1"/>
               </a:solidFill>
@@ -4327,7 +4421,7 @@
           </a:p>
           <a:p>
             <a:r>
-              <a:rPr lang="en-US" sz="4400" dirty="0">
+              <a:rPr lang="en-US" sz="5400" dirty="0">
                 <a:solidFill>
                   <a:schemeClr val="bg1"/>
                 </a:solidFill>
@@ -4339,7 +4433,7 @@
           </a:p>
           <a:p>
             <a:r>
-              <a:rPr lang="en-US" sz="4400" dirty="0">
+              <a:rPr lang="en-US" sz="5400" dirty="0">
                 <a:solidFill>
                   <a:schemeClr val="bg1"/>
                 </a:solidFill>
@@ -4350,7 +4444,7 @@
             </a:r>
           </a:p>
           <a:p>
-            <a:endParaRPr lang="en-US" sz="4400" dirty="0">
+            <a:endParaRPr lang="en-US" sz="5400" dirty="0">
               <a:solidFill>
                 <a:schemeClr val="bg1"/>
               </a:solidFill>
@@ -4432,7 +4526,7 @@
           </a:bodyPr>
           <a:lstStyle/>
           <a:p>
-            <a:endParaRPr lang="en-US" sz="4400" dirty="0">
+            <a:endParaRPr lang="en-US" sz="5400" dirty="0">
               <a:solidFill>
                 <a:schemeClr val="bg1"/>
               </a:solidFill>
@@ -4442,7 +4536,7 @@
           </a:p>
           <a:p>
             <a:r>
-              <a:rPr lang="en-US" sz="4400" dirty="0">
+              <a:rPr lang="en-US" sz="5400" dirty="0">
                 <a:solidFill>
                   <a:schemeClr val="bg1"/>
                 </a:solidFill>
@@ -4454,7 +4548,7 @@
           </a:p>
           <a:p>
             <a:r>
-              <a:rPr lang="en-US" sz="4400" dirty="0">
+              <a:rPr lang="en-US" sz="5400" dirty="0">
                 <a:solidFill>
                   <a:schemeClr val="bg1"/>
                 </a:solidFill>
@@ -4465,7 +4559,7 @@
             </a:r>
           </a:p>
           <a:p>
-            <a:endParaRPr lang="en-US" sz="4400" dirty="0">
+            <a:endParaRPr lang="en-US" sz="5400" dirty="0">
               <a:solidFill>
                 <a:schemeClr val="bg1"/>
               </a:solidFill>
@@ -4475,7 +4569,7 @@
           </a:p>
           <a:p>
             <a:r>
-              <a:rPr lang="en-US" sz="4400" dirty="0">
+              <a:rPr lang="en-US" sz="5400" dirty="0">
                 <a:solidFill>
                   <a:schemeClr val="bg1"/>
                 </a:solidFill>
@@ -4487,7 +4581,7 @@
           </a:p>
           <a:p>
             <a:r>
-              <a:rPr lang="en-US" sz="4400" dirty="0">
+              <a:rPr lang="en-US" sz="5400" dirty="0">
                 <a:solidFill>
                   <a:schemeClr val="bg1"/>
                 </a:solidFill>
@@ -4498,7 +4592,7 @@
             </a:r>
           </a:p>
           <a:p>
-            <a:endParaRPr lang="en-US" sz="4400" dirty="0">
+            <a:endParaRPr lang="en-US" sz="5400" dirty="0">
               <a:solidFill>
                 <a:schemeClr val="bg1"/>
               </a:solidFill>
@@ -4580,7 +4674,7 @@
           </a:bodyPr>
           <a:lstStyle/>
           <a:p>
-            <a:endParaRPr lang="en-US" sz="4400" dirty="0">
+            <a:endParaRPr lang="en-US" sz="5400" dirty="0">
               <a:solidFill>
                 <a:schemeClr val="bg1"/>
               </a:solidFill>
@@ -4590,7 +4684,7 @@
           </a:p>
           <a:p>
             <a:r>
-              <a:rPr lang="en-US" sz="4400" dirty="0">
+              <a:rPr lang="en-US" sz="5400" dirty="0">
                 <a:solidFill>
                   <a:schemeClr val="bg1"/>
                 </a:solidFill>
@@ -4602,7 +4696,7 @@
           </a:p>
           <a:p>
             <a:r>
-              <a:rPr lang="en-US" sz="4400" dirty="0">
+              <a:rPr lang="en-US" sz="5400" dirty="0">
                 <a:solidFill>
                   <a:schemeClr val="bg1"/>
                 </a:solidFill>
@@ -4614,7 +4708,7 @@
           </a:p>
           <a:p>
             <a:r>
-              <a:rPr lang="en-US" sz="4400" dirty="0">
+              <a:rPr lang="en-US" sz="5400" dirty="0">
                 <a:solidFill>
                   <a:schemeClr val="bg1"/>
                 </a:solidFill>
@@ -4625,7 +4719,7 @@
             </a:r>
           </a:p>
           <a:p>
-            <a:endParaRPr lang="en-US" sz="4400" dirty="0">
+            <a:endParaRPr lang="en-US" sz="5400" dirty="0">
               <a:solidFill>
                 <a:schemeClr val="bg1"/>
               </a:solidFill>
@@ -4707,7 +4801,7 @@
           </a:bodyPr>
           <a:lstStyle/>
           <a:p>
-            <a:endParaRPr lang="en-US" sz="4400" dirty="0">
+            <a:endParaRPr lang="en-US" sz="5400" dirty="0">
               <a:solidFill>
                 <a:schemeClr val="bg1"/>
               </a:solidFill>
@@ -4717,7 +4811,7 @@
           </a:p>
           <a:p>
             <a:r>
-              <a:rPr lang="en-US" sz="4400" dirty="0">
+              <a:rPr lang="en-US" sz="5400" dirty="0">
                 <a:solidFill>
                   <a:schemeClr val="bg1"/>
                 </a:solidFill>
@@ -4729,7 +4823,7 @@
           </a:p>
           <a:p>
             <a:r>
-              <a:rPr lang="en-US" sz="4400" dirty="0">
+              <a:rPr lang="en-US" sz="5400" dirty="0">
                 <a:solidFill>
                   <a:schemeClr val="bg1"/>
                 </a:solidFill>
@@ -4740,7 +4834,31 @@
             </a:r>
           </a:p>
           <a:p>
-            <a:endParaRPr lang="en-US" sz="4400" dirty="0">
+            <a:r>
+              <a:rPr lang="en-US" sz="5400" dirty="0">
+                <a:solidFill>
+                  <a:schemeClr val="bg1"/>
+                </a:solidFill>
+                <a:latin typeface="Avenir Medium" panose="02000503020000020003" pitchFamily="2" charset="0"/>
+                <a:ea typeface="Bodoni Ornaments" pitchFamily="2" charset="0"/>
+              </a:rPr>
+              <a:t>You took the fall, </a:t>
+            </a:r>
+          </a:p>
+          <a:p>
+            <a:r>
+              <a:rPr lang="en-US" sz="5400" dirty="0">
+                <a:solidFill>
+                  <a:schemeClr val="bg1"/>
+                </a:solidFill>
+                <a:latin typeface="Avenir Medium" panose="02000503020000020003" pitchFamily="2" charset="0"/>
+                <a:ea typeface="Bodoni Ornaments" pitchFamily="2" charset="0"/>
+              </a:rPr>
+              <a:t>and thought of me </a:t>
+            </a:r>
+          </a:p>
+          <a:p>
+            <a:endParaRPr lang="en-US" sz="5400" dirty="0">
               <a:solidFill>
                 <a:schemeClr val="bg1"/>
               </a:solidFill>
@@ -4750,40 +4868,7 @@
           </a:p>
           <a:p>
             <a:r>
-              <a:rPr lang="en-US" sz="4400" dirty="0">
-                <a:solidFill>
-                  <a:schemeClr val="bg1"/>
-                </a:solidFill>
-                <a:latin typeface="Avenir Medium" panose="02000503020000020003" pitchFamily="2" charset="0"/>
-                <a:ea typeface="Bodoni Ornaments" pitchFamily="2" charset="0"/>
-              </a:rPr>
-              <a:t>You took the fall, </a:t>
-            </a:r>
-          </a:p>
-          <a:p>
-            <a:r>
-              <a:rPr lang="en-US" sz="4400" dirty="0">
-                <a:solidFill>
-                  <a:schemeClr val="bg1"/>
-                </a:solidFill>
-                <a:latin typeface="Avenir Medium" panose="02000503020000020003" pitchFamily="2" charset="0"/>
-                <a:ea typeface="Bodoni Ornaments" pitchFamily="2" charset="0"/>
-              </a:rPr>
-              <a:t>and thought of me </a:t>
-            </a:r>
-          </a:p>
-          <a:p>
-            <a:endParaRPr lang="en-US" sz="4400" dirty="0">
-              <a:solidFill>
-                <a:schemeClr val="bg1"/>
-              </a:solidFill>
-              <a:latin typeface="Avenir Medium" panose="02000503020000020003" pitchFamily="2" charset="0"/>
-              <a:ea typeface="Bodoni Ornaments" pitchFamily="2" charset="0"/>
-            </a:endParaRPr>
-          </a:p>
-          <a:p>
-            <a:r>
-              <a:rPr lang="en-US" sz="4400" dirty="0">
+              <a:rPr lang="en-US" sz="5400" dirty="0">
                 <a:solidFill>
                   <a:schemeClr val="bg1"/>
                 </a:solidFill>
@@ -4794,7 +4879,7 @@
             </a:r>
           </a:p>
           <a:p>
-            <a:endParaRPr lang="en-US" sz="4400" dirty="0">
+            <a:endParaRPr lang="en-US" sz="5400" dirty="0">
               <a:solidFill>
                 <a:schemeClr val="bg1"/>
               </a:solidFill>
@@ -4876,7 +4961,7 @@
           </a:bodyPr>
           <a:lstStyle/>
           <a:p>
-            <a:endParaRPr lang="en-US" sz="4400" dirty="0">
+            <a:endParaRPr lang="en-US" sz="5400" dirty="0">
               <a:solidFill>
                 <a:schemeClr val="bg1"/>
               </a:solidFill>
@@ -4885,7 +4970,7 @@
             </a:endParaRPr>
           </a:p>
           <a:p>
-            <a:endParaRPr lang="en-US" sz="4400" dirty="0">
+            <a:endParaRPr lang="en-US" sz="5400" dirty="0">
               <a:solidFill>
                 <a:schemeClr val="bg1"/>
               </a:solidFill>
@@ -4895,30 +4980,54 @@
           </a:p>
           <a:p>
             <a:r>
-              <a:rPr lang="en-US" sz="4400" dirty="0">
-                <a:solidFill>
-                  <a:schemeClr val="bg1"/>
-                </a:solidFill>
-                <a:latin typeface="Avenir Medium" panose="02000503020000020003" pitchFamily="2" charset="0"/>
-                <a:ea typeface="Bodoni Ornaments" pitchFamily="2" charset="0"/>
-              </a:rPr>
-              <a:t>Above all powers, above all Kings</a:t>
-            </a:r>
-          </a:p>
-          <a:p>
-            <a:r>
-              <a:rPr lang="en-US" sz="4400" dirty="0">
-                <a:solidFill>
-                  <a:schemeClr val="bg1"/>
-                </a:solidFill>
-                <a:latin typeface="Avenir Medium" panose="02000503020000020003" pitchFamily="2" charset="0"/>
-                <a:ea typeface="Bodoni Ornaments" pitchFamily="2" charset="0"/>
-              </a:rPr>
-              <a:t>Above all nature, and all created things</a:t>
-            </a:r>
-          </a:p>
-          <a:p>
-            <a:endParaRPr lang="en-US" sz="4400" dirty="0">
+              <a:rPr lang="en-US" sz="5400" dirty="0">
+                <a:solidFill>
+                  <a:schemeClr val="bg1"/>
+                </a:solidFill>
+                <a:latin typeface="Avenir Medium" panose="02000503020000020003" pitchFamily="2" charset="0"/>
+                <a:ea typeface="Bodoni Ornaments" pitchFamily="2" charset="0"/>
+              </a:rPr>
+              <a:t>Above all powers, </a:t>
+            </a:r>
+          </a:p>
+          <a:p>
+            <a:r>
+              <a:rPr lang="en-US" sz="5400" dirty="0">
+                <a:solidFill>
+                  <a:schemeClr val="bg1"/>
+                </a:solidFill>
+                <a:latin typeface="Avenir Medium" panose="02000503020000020003" pitchFamily="2" charset="0"/>
+                <a:ea typeface="Bodoni Ornaments" pitchFamily="2" charset="0"/>
+              </a:rPr>
+              <a:t>above all Kings</a:t>
+            </a:r>
+          </a:p>
+          <a:p>
+            <a:r>
+              <a:rPr lang="en-US" sz="5400" dirty="0">
+                <a:solidFill>
+                  <a:schemeClr val="bg1"/>
+                </a:solidFill>
+                <a:latin typeface="Avenir Medium" panose="02000503020000020003" pitchFamily="2" charset="0"/>
+                <a:ea typeface="Bodoni Ornaments" pitchFamily="2" charset="0"/>
+              </a:rPr>
+              <a:t>Above all nature, </a:t>
+            </a:r>
+          </a:p>
+          <a:p>
+            <a:r>
+              <a:rPr lang="en-US" sz="5400" dirty="0">
+                <a:solidFill>
+                  <a:schemeClr val="bg1"/>
+                </a:solidFill>
+                <a:latin typeface="Avenir Medium" panose="02000503020000020003" pitchFamily="2" charset="0"/>
+                <a:ea typeface="Bodoni Ornaments" pitchFamily="2" charset="0"/>
+              </a:rPr>
+              <a:t>and all created things</a:t>
+            </a:r>
+          </a:p>
+          <a:p>
+            <a:endParaRPr lang="en-US" sz="5400" dirty="0">
               <a:solidFill>
                 <a:schemeClr val="bg1"/>
               </a:solidFill>
@@ -5000,7 +5109,7 @@
           </a:bodyPr>
           <a:lstStyle/>
           <a:p>
-            <a:endParaRPr lang="en-US" sz="4400" dirty="0">
+            <a:endParaRPr lang="en-US" sz="5400" dirty="0">
               <a:solidFill>
                 <a:schemeClr val="bg1"/>
               </a:solidFill>
@@ -5009,7 +5118,31 @@
             </a:endParaRPr>
           </a:p>
           <a:p>
-            <a:endParaRPr lang="en-US" sz="4400" dirty="0">
+            <a:r>
+              <a:rPr lang="en-US" sz="5400" dirty="0">
+                <a:solidFill>
+                  <a:schemeClr val="bg1"/>
+                </a:solidFill>
+                <a:latin typeface="Avenir Medium" panose="02000503020000020003" pitchFamily="2" charset="0"/>
+                <a:ea typeface="Bodoni Ornaments" pitchFamily="2" charset="0"/>
+              </a:rPr>
+              <a:t>Above all wisdom, </a:t>
+            </a:r>
+          </a:p>
+          <a:p>
+            <a:r>
+              <a:rPr lang="en-US" sz="5400" dirty="0">
+                <a:solidFill>
+                  <a:schemeClr val="bg1"/>
+                </a:solidFill>
+                <a:latin typeface="Avenir Medium" panose="02000503020000020003" pitchFamily="2" charset="0"/>
+                <a:ea typeface="Bodoni Ornaments" pitchFamily="2" charset="0"/>
+              </a:rPr>
+              <a:t>and all the ways of man </a:t>
+            </a:r>
+          </a:p>
+          <a:p>
+            <a:endParaRPr lang="en-US" sz="5400" dirty="0">
               <a:solidFill>
                 <a:schemeClr val="bg1"/>
               </a:solidFill>
@@ -5019,40 +5152,7 @@
           </a:p>
           <a:p>
             <a:r>
-              <a:rPr lang="en-US" sz="4400" dirty="0">
-                <a:solidFill>
-                  <a:schemeClr val="bg1"/>
-                </a:solidFill>
-                <a:latin typeface="Avenir Medium" panose="02000503020000020003" pitchFamily="2" charset="0"/>
-                <a:ea typeface="Bodoni Ornaments" pitchFamily="2" charset="0"/>
-              </a:rPr>
-              <a:t>Above all wisdom, </a:t>
-            </a:r>
-          </a:p>
-          <a:p>
-            <a:r>
-              <a:rPr lang="en-US" sz="4400" dirty="0">
-                <a:solidFill>
-                  <a:schemeClr val="bg1"/>
-                </a:solidFill>
-                <a:latin typeface="Avenir Medium" panose="02000503020000020003" pitchFamily="2" charset="0"/>
-                <a:ea typeface="Bodoni Ornaments" pitchFamily="2" charset="0"/>
-              </a:rPr>
-              <a:t>and all the ways of man </a:t>
-            </a:r>
-          </a:p>
-          <a:p>
-            <a:endParaRPr lang="en-US" sz="4400" dirty="0">
-              <a:solidFill>
-                <a:schemeClr val="bg1"/>
-              </a:solidFill>
-              <a:latin typeface="Avenir Medium" panose="02000503020000020003" pitchFamily="2" charset="0"/>
-              <a:ea typeface="Bodoni Ornaments" pitchFamily="2" charset="0"/>
-            </a:endParaRPr>
-          </a:p>
-          <a:p>
-            <a:r>
-              <a:rPr lang="en-US" sz="4400" dirty="0">
+              <a:rPr lang="en-US" sz="5400" dirty="0">
                 <a:solidFill>
                   <a:schemeClr val="bg1"/>
                 </a:solidFill>
@@ -5064,7 +5164,7 @@
           </a:p>
           <a:p>
             <a:r>
-              <a:rPr lang="en-US" sz="4400" dirty="0">
+              <a:rPr lang="en-US" sz="5400" dirty="0">
                 <a:solidFill>
                   <a:schemeClr val="bg1"/>
                 </a:solidFill>
@@ -5075,7 +5175,7 @@
             </a:r>
           </a:p>
           <a:p>
-            <a:endParaRPr lang="en-US" sz="4400" dirty="0">
+            <a:endParaRPr lang="en-US" sz="5400" dirty="0">
               <a:solidFill>
                 <a:schemeClr val="bg1"/>
               </a:solidFill>
